--- a/Development_D4/Guided_Practice/D4-L07_Practice_Room_Resources_and_Sustainability.pptx
+++ b/Development_D4/Guided_Practice/D4-L07_Practice_Room_Resources_and_Sustainability.pptx
@@ -11987,11 +11987,11 @@
           <a:bodyPr wrap="square" lIns="0" tIns="0" rIns="0" bIns="0" rtlCol="0" anchor="ctr"/>
           <a:lstStyle/>
           <a:p>
-            <a:pPr algn="l" indent="0" marL="0">
-              <a:buNone/>
-            </a:pPr>
-            <a:r>
-              <a:rPr lang="ar-SA" altLang="en-US" sz="3900" b="1" dirty="0">
+            <a:pPr rtl="1" algn="r" indent="0" marL="0">
+              <a:buNone/>
+            </a:pPr>
+            <a:r>
+              <a:rPr lang="ar-SA" altLang="en-US" sz="3000" b="1" dirty="0">
                 <a:solidFill>
                   <a:srgbClr val="B83227"/>
                 </a:solidFill>
@@ -11999,22 +11999,9 @@
                 <a:ea typeface="Amiri" pitchFamily="2" charset="-78"/>
                 <a:cs typeface="Amiri" pitchFamily="2" charset="-78"/>
               </a:rPr>
-              <a:t>إِذَا اسْتَمَرَّ التَّلَوُّثُ، سَيَنْضَبُ</a:t>
-            </a:r>
-            <a:pPr algn="l" indent="0" marL="0">
-              <a:buNone/>
-            </a:pPr>
-            <a:r>
-              <a:rPr lang="en-US" sz="3000" b="1" dirty="0">
-                <a:solidFill>
-                  <a:srgbClr val="B83227"/>
-                </a:solidFill>
-                <a:latin typeface="Calibri" pitchFamily="34" charset="0"/>
-                <a:cs typeface="Amiri" pitchFamily="2" charset="-78"/>
-              </a:rPr>
-              <a:t> … (no fa-)</a:t>
-            </a:r>
-            <a:endParaRPr lang="en-US" sz="3000" dirty="0"/>
+              <a:t>إِذَا اسْتَمَرَّ التَّلَوُّثُ، سَيَنْضَبُ المَاءُ النَّظِيفُ.</a:t>
+            </a:r>
+            <a:endParaRPr lang="ar-SA" sz="3000" dirty="0"/>
           </a:p>
         </p:txBody>
       </p:sp>
@@ -13017,11 +13004,14 @@
           <a:bodyPr wrap="square" lIns="0" tIns="0" rIns="0" bIns="0" rtlCol="0" anchor="ctr"/>
           <a:lstStyle/>
           <a:p>
-            <a:pPr algn="l" indent="0" marL="0">
-              <a:buNone/>
-            </a:pPr>
-            <a:r>
-              <a:rPr lang="ar-SA" altLang="en-US" sz="2350" dirty="0">
+            <a:pPr rtl="1" algn="r" indent="0" marL="0">
+              <a:lnSpc>
+                <a:spcPct val="120000"/>
+              </a:lnSpc>
+              <a:buNone/>
+            </a:pPr>
+            <a:r>
+              <a:rPr lang="ar-SA" altLang="en-US" sz="1800" b="1" dirty="0">
                 <a:solidFill>
                   <a:srgbClr val="B83227"/>
                 </a:solidFill>
@@ -13029,22 +13019,9 @@
                 <a:ea typeface="Amiri" pitchFamily="2" charset="-78"/>
                 <a:cs typeface="Amiri" pitchFamily="2" charset="-78"/>
               </a:rPr>
-              <a:t>إِذَا اسْتَمَرَّ التَّلَوُّثُ، سَيَنْضَبُ</a:t>
-            </a:r>
-            <a:pPr algn="l" indent="0" marL="0">
-              <a:buNone/>
-            </a:pPr>
-            <a:r>
-              <a:rPr lang="en-US" sz="1800" dirty="0">
-                <a:solidFill>
-                  <a:srgbClr val="B83227"/>
-                </a:solidFill>
-                <a:latin typeface="Calibri" pitchFamily="34" charset="0"/>
-                <a:cs typeface="Amiri" pitchFamily="2" charset="-78"/>
-              </a:rPr>
-              <a:t> … (no fa-)</a:t>
-            </a:r>
-            <a:endParaRPr lang="en-US" sz="1800" dirty="0"/>
+              <a:t>إِذَا اسْتَمَرَّ التَّلَوُّثُ، سَيَنْضَبُ المَاءُ النَّظِيفُ.</a:t>
+            </a:r>
+            <a:endParaRPr lang="ar-SA" sz="1800" dirty="0"/>
           </a:p>
         </p:txBody>
       </p:sp>
@@ -13131,10 +13108,13 @@
           <a:lstStyle/>
           <a:p>
             <a:pPr rtl="1" algn="r" indent="0" marL="0">
-              <a:buNone/>
-            </a:pPr>
-            <a:r>
-              <a:rPr lang="ar-SA" altLang="en-US" sz="2400" b="1" dirty="0">
+              <a:lnSpc>
+                <a:spcPct val="120000"/>
+              </a:lnSpc>
+              <a:buNone/>
+            </a:pPr>
+            <a:r>
+              <a:rPr lang="ar-SA" altLang="en-US" sz="2150" b="1" dirty="0">
                 <a:solidFill>
                   <a:srgbClr val="1E6B52"/>
                 </a:solidFill>
@@ -13142,9 +13122,9 @@
                 <a:ea typeface="Amiri" pitchFamily="2" charset="-78"/>
                 <a:cs typeface="Amiri" pitchFamily="2" charset="-78"/>
               </a:rPr>
-              <a:t>إِذَا اسْتَمَرَّ التَّلَوُّثُ، فَسَوْفَ يَنْضَبُ …</a:t>
-            </a:r>
-            <a:endParaRPr lang="ar-SA" sz="2400" dirty="0"/>
+              <a:t>إِذَا اسْتَمَرَّ التَّلَوُّثُ، فَسَوْفَ يَنْضَبُ المَاءُ النَّظِيفُ.</a:t>
+            </a:r>
+            <a:endParaRPr lang="ar-SA" sz="2150" dirty="0"/>
           </a:p>
         </p:txBody>
       </p:sp>
@@ -14670,11 +14650,11 @@
           <a:bodyPr wrap="square" lIns="0" tIns="0" rIns="0" bIns="0" rtlCol="0" anchor="ctr"/>
           <a:lstStyle/>
           <a:p>
-            <a:pPr algn="l" indent="0" marL="0">
-              <a:buNone/>
-            </a:pPr>
-            <a:r>
-              <a:rPr lang="ar-SA" altLang="en-US" sz="2000" b="1" dirty="0">
+            <a:pPr rtl="1" algn="r" indent="0" marL="0">
+              <a:buNone/>
+            </a:pPr>
+            <a:r>
+              <a:rPr lang="ar-SA" altLang="en-US" sz="1600" b="1" dirty="0">
                 <a:solidFill>
                   <a:srgbClr val="1B3B6F"/>
                 </a:solidFill>
@@ -14682,238 +14662,9 @@
                 <a:ea typeface="Amiri" pitchFamily="2" charset="-78"/>
                 <a:cs typeface="Amiri" pitchFamily="2" charset="-78"/>
               </a:rPr>
-              <a:t>المَوَارِدُ</a:t>
-            </a:r>
-            <a:pPr algn="l" indent="0" marL="0">
-              <a:buNone/>
-            </a:pPr>
-            <a:r>
-              <a:rPr lang="en-US" sz="1550" b="1" dirty="0">
-                <a:solidFill>
-                  <a:srgbClr val="1B3B6F"/>
-                </a:solidFill>
-                <a:latin typeface="Calibri" pitchFamily="34" charset="0"/>
-                <a:cs typeface="Amiri" pitchFamily="2" charset="-78"/>
-              </a:rPr>
-              <a:t>  ·  </a:t>
-            </a:r>
-            <a:pPr algn="l" indent="0" marL="0">
-              <a:buNone/>
-            </a:pPr>
-            <a:r>
-              <a:rPr lang="ar-SA" altLang="en-US" sz="2000" b="1" dirty="0">
-                <a:solidFill>
-                  <a:srgbClr val="1B3B6F"/>
-                </a:solidFill>
-                <a:latin typeface="Amiri" pitchFamily="2" charset="-78"/>
-                <a:ea typeface="Amiri" pitchFamily="2" charset="-78"/>
-                <a:cs typeface="Amiri" pitchFamily="2" charset="-78"/>
-              </a:rPr>
-              <a:t>الاسْتِدَامَةُ</a:t>
-            </a:r>
-            <a:pPr algn="l" indent="0" marL="0">
-              <a:buNone/>
-            </a:pPr>
-            <a:r>
-              <a:rPr lang="en-US" sz="1550" b="1" dirty="0">
-                <a:solidFill>
-                  <a:srgbClr val="1B3B6F"/>
-                </a:solidFill>
-                <a:latin typeface="Calibri" pitchFamily="34" charset="0"/>
-                <a:cs typeface="Amiri" pitchFamily="2" charset="-78"/>
-              </a:rPr>
-              <a:t>  ·  </a:t>
-            </a:r>
-            <a:pPr algn="l" indent="0" marL="0">
-              <a:buNone/>
-            </a:pPr>
-            <a:r>
-              <a:rPr lang="ar-SA" altLang="en-US" sz="2000" b="1" dirty="0">
-                <a:solidFill>
-                  <a:srgbClr val="1B3B6F"/>
-                </a:solidFill>
-                <a:latin typeface="Amiri" pitchFamily="2" charset="-78"/>
-                <a:ea typeface="Amiri" pitchFamily="2" charset="-78"/>
-                <a:cs typeface="Amiri" pitchFamily="2" charset="-78"/>
-              </a:rPr>
-              <a:t>شُحُّ المِيَاهِ</a:t>
-            </a:r>
-            <a:pPr algn="l" indent="0" marL="0">
-              <a:buNone/>
-            </a:pPr>
-            <a:r>
-              <a:rPr lang="en-US" sz="1550" b="1" dirty="0">
-                <a:solidFill>
-                  <a:srgbClr val="1B3B6F"/>
-                </a:solidFill>
-                <a:latin typeface="Calibri" pitchFamily="34" charset="0"/>
-                <a:cs typeface="Amiri" pitchFamily="2" charset="-78"/>
-              </a:rPr>
-              <a:t>  ·  </a:t>
-            </a:r>
-            <a:pPr algn="l" indent="0" marL="0">
-              <a:buNone/>
-            </a:pPr>
-            <a:r>
-              <a:rPr lang="ar-SA" altLang="en-US" sz="2000" b="1" dirty="0">
-                <a:solidFill>
-                  <a:srgbClr val="1B3B6F"/>
-                </a:solidFill>
-                <a:latin typeface="Amiri" pitchFamily="2" charset="-78"/>
-                <a:ea typeface="Amiri" pitchFamily="2" charset="-78"/>
-                <a:cs typeface="Amiri" pitchFamily="2" charset="-78"/>
-              </a:rPr>
-              <a:t>الوَقُودُ الأُحْفُورِيُّ</a:t>
-            </a:r>
-            <a:pPr algn="l" indent="0" marL="0">
-              <a:buNone/>
-            </a:pPr>
-            <a:r>
-              <a:rPr lang="en-US" sz="1550" b="1" dirty="0">
-                <a:solidFill>
-                  <a:srgbClr val="1B3B6F"/>
-                </a:solidFill>
-                <a:latin typeface="Calibri" pitchFamily="34" charset="0"/>
-                <a:cs typeface="Amiri" pitchFamily="2" charset="-78"/>
-              </a:rPr>
-              <a:t>  ·  </a:t>
-            </a:r>
-            <a:pPr algn="l" indent="0" marL="0">
-              <a:buNone/>
-            </a:pPr>
-            <a:r>
-              <a:rPr lang="ar-SA" altLang="en-US" sz="2000" b="1" dirty="0">
-                <a:solidFill>
-                  <a:srgbClr val="1B3B6F"/>
-                </a:solidFill>
-                <a:latin typeface="Amiri" pitchFamily="2" charset="-78"/>
-                <a:ea typeface="Amiri" pitchFamily="2" charset="-78"/>
-                <a:cs typeface="Amiri" pitchFamily="2" charset="-78"/>
-              </a:rPr>
-              <a:t>المِيَاهُ الجَوْفِيَّةُ</a:t>
-            </a:r>
-            <a:pPr algn="l" indent="0" marL="0">
-              <a:buNone/>
-            </a:pPr>
-            <a:r>
-              <a:rPr lang="en-US" sz="1550" b="1" dirty="0">
-                <a:solidFill>
-                  <a:srgbClr val="1B3B6F"/>
-                </a:solidFill>
-                <a:latin typeface="Calibri" pitchFamily="34" charset="0"/>
-                <a:cs typeface="Amiri" pitchFamily="2" charset="-78"/>
-              </a:rPr>
-              <a:t>  ·  </a:t>
-            </a:r>
-            <a:pPr algn="l" indent="0" marL="0">
-              <a:buNone/>
-            </a:pPr>
-            <a:r>
-              <a:rPr lang="ar-SA" altLang="en-US" sz="2000" b="1" dirty="0">
-                <a:solidFill>
-                  <a:srgbClr val="1B3B6F"/>
-                </a:solidFill>
-                <a:latin typeface="Amiri" pitchFamily="2" charset="-78"/>
-                <a:ea typeface="Amiri" pitchFamily="2" charset="-78"/>
-                <a:cs typeface="Amiri" pitchFamily="2" charset="-78"/>
-              </a:rPr>
-              <a:t>الاسْتِهْلَاكُ</a:t>
-            </a:r>
-            <a:pPr algn="l" indent="0" marL="0">
-              <a:buNone/>
-            </a:pPr>
-            <a:r>
-              <a:rPr lang="en-US" sz="1550" b="1" dirty="0">
-                <a:solidFill>
-                  <a:srgbClr val="1B3B6F"/>
-                </a:solidFill>
-                <a:latin typeface="Calibri" pitchFamily="34" charset="0"/>
-                <a:cs typeface="Amiri" pitchFamily="2" charset="-78"/>
-              </a:rPr>
-              <a:t>  ·  </a:t>
-            </a:r>
-            <a:pPr algn="l" indent="0" marL="0">
-              <a:buNone/>
-            </a:pPr>
-            <a:r>
-              <a:rPr lang="ar-SA" altLang="en-US" sz="2000" b="1" dirty="0">
-                <a:solidFill>
-                  <a:srgbClr val="1B3B6F"/>
-                </a:solidFill>
-                <a:latin typeface="Amiri" pitchFamily="2" charset="-78"/>
-                <a:ea typeface="Amiri" pitchFamily="2" charset="-78"/>
-                <a:cs typeface="Amiri" pitchFamily="2" charset="-78"/>
-              </a:rPr>
-              <a:t>يَنْضَبُ</a:t>
-            </a:r>
-            <a:pPr algn="l" indent="0" marL="0">
-              <a:buNone/>
-            </a:pPr>
-            <a:r>
-              <a:rPr lang="en-US" sz="1550" b="1" dirty="0">
-                <a:solidFill>
-                  <a:srgbClr val="1B3B6F"/>
-                </a:solidFill>
-                <a:latin typeface="Calibri" pitchFamily="34" charset="0"/>
-                <a:cs typeface="Amiri" pitchFamily="2" charset="-78"/>
-              </a:rPr>
-              <a:t> · </a:t>
-            </a:r>
-            <a:pPr algn="l" indent="0" marL="0">
-              <a:buNone/>
-            </a:pPr>
-            <a:r>
-              <a:rPr lang="ar-SA" altLang="en-US" sz="2000" b="1" dirty="0">
-                <a:solidFill>
-                  <a:srgbClr val="1B3B6F"/>
-                </a:solidFill>
-                <a:latin typeface="Amiri" pitchFamily="2" charset="-78"/>
-                <a:ea typeface="Amiri" pitchFamily="2" charset="-78"/>
-                <a:cs typeface="Amiri" pitchFamily="2" charset="-78"/>
-              </a:rPr>
-              <a:t>يَشِحُّ</a:t>
-            </a:r>
-            <a:pPr algn="l" indent="0" marL="0">
-              <a:buNone/>
-            </a:pPr>
-            <a:r>
-              <a:rPr lang="en-US" sz="1550" b="1" dirty="0">
-                <a:solidFill>
-                  <a:srgbClr val="1B3B6F"/>
-                </a:solidFill>
-                <a:latin typeface="Calibri" pitchFamily="34" charset="0"/>
-                <a:cs typeface="Amiri" pitchFamily="2" charset="-78"/>
-              </a:rPr>
-              <a:t>  ·  </a:t>
-            </a:r>
-            <a:pPr algn="l" indent="0" marL="0">
-              <a:buNone/>
-            </a:pPr>
-            <a:r>
-              <a:rPr lang="ar-SA" altLang="en-US" sz="2000" b="1" dirty="0">
-                <a:solidFill>
-                  <a:srgbClr val="1B3B6F"/>
-                </a:solidFill>
-                <a:latin typeface="Amiri" pitchFamily="2" charset="-78"/>
-                <a:ea typeface="Amiri" pitchFamily="2" charset="-78"/>
-                <a:cs typeface="Amiri" pitchFamily="2" charset="-78"/>
-              </a:rPr>
-              <a:t>إِذَا لَمْ</a:t>
-            </a:r>
-            <a:pPr algn="l" indent="0" marL="0">
-              <a:buNone/>
-            </a:pPr>
-            <a:r>
-              <a:rPr lang="en-US" sz="1550" b="1" dirty="0">
-                <a:solidFill>
-                  <a:srgbClr val="1B3B6F"/>
-                </a:solidFill>
-                <a:latin typeface="Calibri" pitchFamily="34" charset="0"/>
-                <a:cs typeface="Amiri" pitchFamily="2" charset="-78"/>
-              </a:rPr>
-              <a:t> + jussive</a:t>
-            </a:r>
-            <a:endParaRPr lang="en-US" sz="1550" dirty="0"/>
+              <a:t>المَوَارِدُ  ·  الاسْتِدَامَةُ  ·  شُحُّ المِيَاهِ  ·  الوَقُودُ الأُحْفُورِيُّ  ·  المِيَاهُ الجَوْفِيَّةُ  ·  الاسْتِهْلَاكُ  ·  يَنْضَبُ · يَشِحُّ  ·  إِذَا لَمْ نُرَشِّدْ</a:t>
+            </a:r>
+            <a:endParaRPr lang="ar-SA" sz="1600" dirty="0"/>
           </a:p>
         </p:txBody>
       </p:sp>
